--- a/it/slides/04-Architettura_dei_Calcolatori-Informazione_Digitale-Codice.pptx
+++ b/it/slides/04-Architettura_dei_Calcolatori-Informazione_Digitale-Codice.pptx
@@ -119,26 +119,30 @@
   <p:extLst>
     <p:ext uri="{521415D9-36F7-43E2-AB2F-B90AF26B5E84}">
       <p14:sectionLst xmlns:p14="http://schemas.microsoft.com/office/powerpoint/2010/main">
-        <p14:section name="Apertura" id="{b5463938-6051-ceb4-3275-2527650b9bfc}">
+        <p14:section name="Apertura" id="{b8d9f17c-98c2-3d06-47b9-9608bd1172be}">
           <p14:sldIdLst>
             <p14:sldId id="256"/>
             <p14:sldId id="257"/>
           </p14:sldIdLst>
         </p14:section>
-        <p14:section name="I listati" id="{a6dfa1b1-d912-f992-2453-2beeace19e8b}">
+        <p14:section name="Strutture dati" id="{628a2739-c768-eb27-b9cb-80031fa9d0b8}">
           <p14:sldIdLst>
             <p14:sldId id="258"/>
+          </p14:sldIdLst>
+        </p14:section>
+        <p14:section name="Dati e algoritmi" id="{3b197df3-d498-d789-c873-f66b24983753}">
+          <p14:sldIdLst>
             <p14:sldId id="259"/>
           </p14:sldIdLst>
         </p14:section>
-        <p14:section name="Il programma completo" id="{bd8189c4-88ed-7573-74eb-d9d5e55294fb}">
+        <p14:section name="Il programma completo" id="{a88874dd-6f69-5836-b56d-0e94a81afd67}">
           <p14:sldIdLst>
             <p14:sldId id="260"/>
             <p14:sldId id="261"/>
             <p14:sldId id="262"/>
           </p14:sldIdLst>
         </p14:section>
-        <p14:section name="Eseguire e provare" id="{ebc5b28e-6391-4c1e-9eb4-3a29cafb8fd3}">
+        <p14:section name="Eseguire e provare" id="{02f78504-2c4f-fb27-4902-747d24745556}">
           <p14:sldIdLst>
             <p14:sldId id="263"/>
             <p14:sldId id="264"/>
@@ -147,7 +151,7 @@
             <p14:sldId id="267"/>
           </p14:sldIdLst>
         </p14:section>
-        <p14:section name="Esercizi" id="{7c1c0d1a-e745-a10f-75f7-436f981c647c}">
+        <p14:section name="Esercizi" id="{2b9fcb90-1ba2-f67e-cc6e-26b8c40344b3}">
           <p14:sldIdLst>
             <p14:sldId id="268"/>
           </p14:sldIdLst>
@@ -2598,7 +2602,63 @@
       </p:sp>
       <p:sp>
         <p:nvSpPr>
-          <p:cNvPr id="11" name="Shape 9"/>
+          <p:cNvPr id="11" name="Text 9"/>
+          <p:cNvSpPr txBox="1"/>
+          <p:nvPr/>
+        </p:nvSpPr>
+        <p:spPr>
+          <a:xfrm>
+            <a:off x="4693615" y="566928"/>
+            <a:ext cx="6949440" cy="640080"/>
+          </a:xfrm>
+          <a:prstGeom prst="rect">
+            <a:avLst/>
+          </a:prstGeom>
+          <a:noFill/>
+          <a:ln/>
+        </p:spPr>
+        <p:txBody>
+          <a:bodyPr wrap="square" lIns="0" tIns="0" rIns="0" bIns="0" rtlCol="0" anchor="t"/>
+          <a:lstStyle/>
+          <a:p>
+            <a:pPr algn="r" indent="0" marL="0">
+              <a:buNone/>
+            </a:pPr>
+            <a:r>
+              <a:rPr lang="en-US" sz="1300" dirty="0">
+                <a:solidFill>
+                  <a:srgbClr val="CFE3EA"/>
+                </a:solidFill>
+                <a:latin typeface="Calibri" pitchFamily="34" charset="0"/>
+                <a:ea typeface="Calibri" pitchFamily="34" charset="-122"/>
+                <a:cs typeface="Calibri" pitchFamily="34" charset="-120"/>
+              </a:rPr>
+              <a:t>Presentazione del codice. I concetti, le figure e le domande sono nella presentazione della lezione:</a:t>
+            </a:r>
+            <a:endParaRPr lang="en-US" sz="1300" dirty="0"/>
+          </a:p>
+          <a:p>
+            <a:pPr algn="r" indent="0" marL="0">
+              <a:buNone/>
+            </a:pPr>
+            <a:r>
+              <a:rPr lang="en-US" sz="1300" dirty="0">
+                <a:solidFill>
+                  <a:srgbClr val="CFE3EA"/>
+                </a:solidFill>
+                <a:latin typeface="Calibri" pitchFamily="34" charset="0"/>
+                <a:ea typeface="Calibri" pitchFamily="34" charset="-122"/>
+                <a:cs typeface="Calibri" pitchFamily="34" charset="-120"/>
+              </a:rPr>
+              <a:t>04-Architettura_dei_Calcolatori-Informazione_Digitale.pptx</a:t>
+            </a:r>
+            <a:endParaRPr lang="en-US" sz="1300" dirty="0"/>
+          </a:p>
+        </p:txBody>
+      </p:sp>
+      <p:sp>
+        <p:nvSpPr>
+          <p:cNvPr id="12" name="Shape 10"/>
           <p:cNvSpPr/>
           <p:nvPr/>
         </p:nvSpPr>
@@ -2625,7 +2685,7 @@
       </p:sp>
       <p:pic>
         <p:nvPicPr>
-          <p:cNvPr id="12" name="Image 0" descr="/Users/raffaelemontella/devel/riscv-prg32/computer-architecture-with-prg32/tools/assets/lab1_step2_hello.png">    </p:cNvPr>
+          <p:cNvPr id="13" name="Image 0" descr="/Users/raffaelemontella/devel/riscv-prg32/computer-architecture-with-prg32/tools/assets/lab1_step2_hello.png">    </p:cNvPr>
           <p:cNvPicPr>
             <a:picLocks noChangeAspect="1"/>
           </p:cNvPicPr>

--- a/it/slides/04-Architettura_dei_Calcolatori-Informazione_Digitale-Codice.pptx
+++ b/it/slides/04-Architettura_dei_Calcolatori-Informazione_Digitale-Codice.pptx
@@ -119,30 +119,30 @@
   <p:extLst>
     <p:ext uri="{521415D9-36F7-43E2-AB2F-B90AF26B5E84}">
       <p14:sectionLst xmlns:p14="http://schemas.microsoft.com/office/powerpoint/2010/main">
-        <p14:section name="Apertura" id="{b8d9f17c-98c2-3d06-47b9-9608bd1172be}">
+        <p14:section name="Apertura" id="{0ebce88b-93cf-2bbe-43c3-6e147e48f994}">
           <p14:sldIdLst>
             <p14:sldId id="256"/>
             <p14:sldId id="257"/>
           </p14:sldIdLst>
         </p14:section>
-        <p14:section name="Strutture dati" id="{628a2739-c768-eb27-b9cb-80031fa9d0b8}">
+        <p14:section name="Strutture dati" id="{7e585314-66ea-eb7b-0c47-2bf44f50bf18}">
           <p14:sldIdLst>
             <p14:sldId id="258"/>
           </p14:sldIdLst>
         </p14:section>
-        <p14:section name="Dati e algoritmi" id="{3b197df3-d498-d789-c873-f66b24983753}">
+        <p14:section name="Dati e algoritmi" id="{d61db9e4-e8f8-213d-6b6f-6c6e6be7281a}">
           <p14:sldIdLst>
             <p14:sldId id="259"/>
           </p14:sldIdLst>
         </p14:section>
-        <p14:section name="Il programma completo" id="{a88874dd-6f69-5836-b56d-0e94a81afd67}">
+        <p14:section name="Il programma completo" id="{c80bde0c-c975-c6fb-336b-201ebeef1c3f}">
           <p14:sldIdLst>
             <p14:sldId id="260"/>
             <p14:sldId id="261"/>
             <p14:sldId id="262"/>
           </p14:sldIdLst>
         </p14:section>
-        <p14:section name="Eseguire e provare" id="{02f78504-2c4f-fb27-4902-747d24745556}">
+        <p14:section name="Eseguire e provare" id="{6fb7b1c5-2cb4-e86d-e6fd-2bf020978f95}">
           <p14:sldIdLst>
             <p14:sldId id="263"/>
             <p14:sldId id="264"/>
@@ -151,7 +151,7 @@
             <p14:sldId id="267"/>
           </p14:sldIdLst>
         </p14:section>
-        <p14:section name="Esercizi" id="{2b9fcb90-1ba2-f67e-cc6e-26b8c40344b3}">
+        <p14:section name="Esercizi" id="{cac513b0-1969-6380-7c86-276a60effe0a}">
           <p14:sldIdLst>
             <p14:sldId id="268"/>
           </p14:sldIdLst>
@@ -560,7 +560,9 @@
           <a:p>
             <a:r>
               <a:rPr lang="en-US" dirty="0"/>
-              <a:t>Questa è la presentazione del codice della Lezione 04. La presentazione della lezione contiene i concetti; questa contiene tutto ciò che si scrive e si esegue: i listati con la loro spiegazione, il programma completo, che cosa mostra, e il modo di provarlo su ciascuno dei tre host.</a:t>
+              <a:t>Questa è la presentazione del codice della Lezione 04. La presentazione della lezione contiene i concetti; questa contiene tutto ciò che si scrive e si esegue: i listati con la loro spiegazione, il programma completo, che cosa mostra, e il modo di provarlo su ciascuno dei tre host.
+Stato di apprendimento: DA COMPRENDERE OGGI, alla fine di questa lezione lo spiegate, lo seguite passo passo e lo applicate da soli; DA UTILIZZARE OGGI, oggi seguite e usate la ricetta; come funziona dentro si spiega più avanti, o non fa parte del corso; DA COMPRENDERE PIÙ AVANTI, riconoscete il nome e lo scopo; lo spiega una lezione successiva. Una slide senza etichetta è contesto: una storia, un esempio, una domanda, un esercizio.
+Stato di apprendimento di questa lezione. DA COMPRENDERE OGGI: analogico e digitale; bit, byte, parola; l'esadecimale; la notazione posizionale; un colore è un numero; caratteri e stringhe; l'ordine little-endian; le strutture dati; gli array in memoria; gli algoritmi. DA UTILIZZARE OGGI: shift come moltiplicazione (Lezione 05) e, usati senza essere studiati nel corso, il programma completo, gli strumenti di PRG32. DA COMPRENDERE PIÙ AVANTI: niente. Una slide senza etichetta è contesto: una storia, un esempio, una domanda, un esercizio.</a:t>
             </a:r>
             <a:endParaRPr lang="en-US" dirty="0"/>
           </a:p>
@@ -649,6 +651,7 @@
             <a:r>
               <a:rPr lang="en-US" dirty="0"/>
               <a:t>Lo stesso programma sull'emulatore. QEMU esegue il firmware vero su un chip emulato, quindi la cartuccia va compilata per l'architettura qemu. Caricate la cartuccia mentre QEMU è chiuso. Il firmware si apre sul menu Setup: scegliete Run Cartridge e lo slot. Ricordate che la tastiera è letta dal terminale, non dalla finestra con l'immagine.
+DA UTILIZZARE OGGI: gli strumenti di PRG32 (si usa, non si studia, in questo corso).
 Per il docente: Verificato dai test fino al caricamento: la cartuccia è compilata per l'architettura qemu e accettata nell'immagine flash dell'emulatore. Ciò che l'emulatore poi mostra non è verificato automaticamente: il QEMU di Espressif ha bisogno della sua finestra. Dall'ottobre 2026 il firmware parte da Setup: scegliete Run Cartridge, poi cart0.</a:t>
             </a:r>
             <a:endParaRPr lang="en-US" dirty="0"/>
@@ -738,6 +741,7 @@
             <a:r>
               <a:rPr lang="en-US" dirty="0"/>
               <a:t>Lo stesso programma sul kit. Il firmware si scrive una volta, via USB; dopo, le cartucce viaggiano sul Wi-Fi. Il comando di caricamento è quello usato per PRG32-QT con l'indirizzo della scheda. È l'unico host che i test automatici non eseguono: provatelo, e riferite ciò che vedete.
+DA UTILIZZARE OGGI: gli strumenti di PRG32 (si usa, non si studia, in questo corso).
 Per il docente: Non eseguito dai test: sulla macchina di prova non c'è una scheda. La cartuccia per l'architettura esp32c6 è compilata dai test; i passi sono quelli della documentazione di PRG32. Se la porta seriale non viene trovata, passatela esplicitamente. Per usare il Wi-Fi dell'aula: python3 -m prg32 wifi set --ssid NOME --password PASSWORD --mode sta.</a:t>
             </a:r>
             <a:endParaRPr lang="en-US" dirty="0"/>
@@ -827,6 +831,7 @@
             <a:r>
               <a:rPr lang="en-US" dirty="0"/>
               <a:t>I cinque sintomi più comuni, che cosa significa ciascuno, e che cosa fare. Leggete il messaggio prima di cambiare qualcosa: quasi sempre nomina la causa.
+DA UTILIZZARE OGGI: gli strumenti di PRG32 (si usa, non si studia, in questo corso).
 Per il docente: Le prime tre righe coprono la maggior parte dei casi. Quando chiedete aiuto, incollate il comando e l'intero messaggio come testo. docs/usage/troubleshooting.md del repository di PRG32 ha l'elenco completo.</a:t>
             </a:r>
             <a:endParaRPr lang="en-US" dirty="0"/>
@@ -1094,6 +1099,7 @@
             <a:r>
               <a:rPr lang="en-US" dirty="0"/>
               <a:t>Un vettore di quattro parole, e le quattro istruzioni che leggono l'elemento 2. la carica l'indirizzo del primo elemento. L'indice viene moltiplicato per 4, la dimensione in byte di una parola, con uno scorrimento a sinistra di 2: scorrere di una posizione raddoppia un numero binario. add forma l'indirizzo dell'elemento, e lw ne legge il valore, 34. L'espressione scores[i] di un linguaggio di alto livello è esattamente questo. Notate che cosa manca: nessuno controlla che l'indice sia minore di 4.
+DA COMPRENDERE OGGI: gli array in memoria. DA UTILIZZARE OGGI: shift come moltiplicazione (si studia nella Lezione 05).
 Per il docente: La proprietà dello scorrimento come moltiplicazione si dimostra nella Lezione 05 (proprietà delle stringhe binarie). Chiedere: che cosa legge lw se i = 4? Ciò che segue il vettore in memoria: la macchina non controlla i limiti.</a:t>
             </a:r>
             <a:endParaRPr lang="en-US" dirty="0"/>
@@ -1183,6 +1189,7 @@
             <a:r>
               <a:rPr lang="en-US" dirty="0"/>
               <a:t>Due esempi di algoritmi che usano il caso. Il primo verifica se un numero è primo provando valori casuali: se una prova fallisce, il numero è certamente composto; se trenta prove passano, è primo con probabilità schiacciante. Barattare una minima probabilità d'errore con un grande guadagno di velocità è il modo in cui la crittografia lavora in pratica. Il secondo è un cammino casuale: il percorso è diverso a ogni esecuzione, e una simulazione media molte esecuzioni. Il listato è pseudocodice, non un linguaggio che si possa compilare.
+DA COMPRENDERE OGGI: gli algoritmi.
 Per il docente: Il test di Fermat mostrato qui è il più semplice; le librerie reali usano Miller-Rabin, che ne chiude le falle. Entrambi gli esempi vengono dalla slide originale.</a:t>
             </a:r>
             <a:endParaRPr lang="en-US" dirty="0"/>
@@ -1272,6 +1279,7 @@
             <a:r>
               <a:rPr lang="en-US" dirty="0"/>
               <a:t>Una pagina del programma completo, esattamente com'è nel repository. Leggetelo dall'inizio: l'intestazione dice che cosa mostra il programma e come compilarlo; seguono le tre funzioni init, update e draw, poi i dati. Le righe incontrate nei listati della lezione hanno qui gli stessi commenti.
+DA UTILIZZARE OGGI: il programma completo (si usa, non si studia, in questo corso).
 Per il docente: code/l04.S, come viene compilato ed eseguito dai test. I commenti fanno parte del programma, e sono in inglese come in tutti i listati: leggeteli con il codice.</a:t>
             </a:r>
             <a:endParaRPr lang="en-US" dirty="0"/>
@@ -1361,6 +1369,7 @@
             <a:r>
               <a:rPr lang="en-US" dirty="0"/>
               <a:t>Una pagina del programma completo, esattamente com'è nel repository. Leggetelo dall'inizio: l'intestazione dice che cosa mostra il programma e come compilarlo; seguono le tre funzioni init, update e draw, poi i dati. Le righe incontrate nei listati della lezione hanno qui gli stessi commenti.
+DA UTILIZZARE OGGI: il programma completo (si usa, non si studia, in questo corso).
 Per il docente: code/l04.S, come viene compilato ed eseguito dai test. I commenti fanno parte del programma, e sono in inglese come in tutti i listati: leggeteli con il codice.</a:t>
             </a:r>
             <a:endParaRPr lang="en-US" dirty="0"/>
@@ -1450,6 +1459,7 @@
             <a:r>
               <a:rPr lang="en-US" dirty="0"/>
               <a:t>Una pagina del programma completo, esattamente com'è nel repository. Leggetelo dall'inizio: l'intestazione dice che cosa mostra il programma e come compilarlo; seguono le tre funzioni init, update e draw, poi i dati. Le righe incontrate nei listati della lezione hanno qui gli stessi commenti.
+DA UTILIZZARE OGGI: il programma completo (si usa, non si studia, in questo corso).
 Per il docente: code/l04.S, come viene compilato ed eseguito dai test. I commenti fanno parte del programma, e sono in inglese come in tutti i listati: leggeteli con il codice.</a:t>
             </a:r>
             <a:endParaRPr lang="en-US" dirty="0"/>
@@ -1628,6 +1638,7 @@
             <a:r>
               <a:rPr lang="en-US" dirty="0"/>
               <a:t>La via più rapida: PRG32-QT sul vostro computer. Quattro passi, ciascuno con il suo comando. PRG32-QT si comporta come una scheda sulla porta 8080, ed è per questo che il comando di caricamento dice esp32c6. Con la modalità debug abilitata potete fermarvi su qualsiasi istruzione e leggere registri e memoria.
+DA UTILIZZARE OGGI: gli strumenti di PRG32 (si usa, non si studia, in questo corso).
 Per il docente: Eseguito dai test: la cartuccia di questa slide è compilata con questo comando ed eseguita sull'esecutore senza interfaccia di PRG32-QT. Senza la toolchain: importate il file .prg32 in PRG32-QT e scegliete Run Cartridge. Tasti: frecce o WASD per il joystick, Z o J per A, X o K per B, Invio per Start, Esc per tornare a Setup.</a:t>
             </a:r>
             <a:endParaRPr lang="en-US" dirty="0"/>
@@ -2709,6 +2720,420 @@
       </p:pic>
       <p:sp>
         <p:nvSpPr>
+          <p:cNvPr id="14" name="Shape 11"/>
+          <p:cNvSpPr/>
+          <p:nvPr/>
+        </p:nvSpPr>
+        <p:spPr>
+          <a:xfrm>
+            <a:off x="8910777" y="91440"/>
+            <a:ext cx="2732278" cy="274320"/>
+          </a:xfrm>
+          <a:prstGeom prst="rect">
+            <a:avLst/>
+          </a:prstGeom>
+          <a:solidFill>
+            <a:srgbClr val="F3E8FF"/>
+          </a:solidFill>
+          <a:ln w="12700">
+            <a:solidFill>
+              <a:srgbClr val="7E22CE"/>
+            </a:solidFill>
+            <a:prstDash val="dash"/>
+          </a:ln>
+        </p:spPr>
+      </p:sp>
+      <p:sp>
+        <p:nvSpPr>
+          <p:cNvPr id="15" name="Shape 12"/>
+          <p:cNvSpPr/>
+          <p:nvPr/>
+        </p:nvSpPr>
+        <p:spPr>
+          <a:xfrm>
+            <a:off x="8938209" y="128016"/>
+            <a:ext cx="45720" cy="45720"/>
+          </a:xfrm>
+          <a:prstGeom prst="rect">
+            <a:avLst/>
+          </a:prstGeom>
+          <a:solidFill>
+            <a:srgbClr val="7E22CE"/>
+          </a:solidFill>
+          <a:ln w="12700">
+            <a:solidFill>
+              <a:srgbClr val="7E22CE"/>
+            </a:solidFill>
+            <a:prstDash val="solid"/>
+          </a:ln>
+        </p:spPr>
+      </p:sp>
+      <p:sp>
+        <p:nvSpPr>
+          <p:cNvPr id="16" name="Shape 13"/>
+          <p:cNvSpPr/>
+          <p:nvPr/>
+        </p:nvSpPr>
+        <p:spPr>
+          <a:xfrm>
+            <a:off x="8938209" y="205740"/>
+            <a:ext cx="45720" cy="45720"/>
+          </a:xfrm>
+          <a:prstGeom prst="rect">
+            <a:avLst/>
+          </a:prstGeom>
+          <a:solidFill>
+            <a:srgbClr val="7E22CE"/>
+          </a:solidFill>
+          <a:ln w="12700">
+            <a:solidFill>
+              <a:srgbClr val="7E22CE"/>
+            </a:solidFill>
+            <a:prstDash val="solid"/>
+          </a:ln>
+        </p:spPr>
+      </p:sp>
+      <p:sp>
+        <p:nvSpPr>
+          <p:cNvPr id="17" name="Shape 14"/>
+          <p:cNvSpPr/>
+          <p:nvPr/>
+        </p:nvSpPr>
+        <p:spPr>
+          <a:xfrm>
+            <a:off x="8938209" y="283464"/>
+            <a:ext cx="45720" cy="45720"/>
+          </a:xfrm>
+          <a:prstGeom prst="rect">
+            <a:avLst/>
+          </a:prstGeom>
+          <a:solidFill>
+            <a:srgbClr val="7E22CE"/>
+          </a:solidFill>
+          <a:ln w="12700">
+            <a:solidFill>
+              <a:srgbClr val="7E22CE"/>
+            </a:solidFill>
+            <a:prstDash val="solid"/>
+          </a:ln>
+        </p:spPr>
+      </p:sp>
+      <p:pic>
+        <p:nvPicPr>
+          <p:cNvPr id="18" name="Image 1" descr="preencoded.png">    </p:cNvPr>
+          <p:cNvPicPr>
+            <a:picLocks noChangeAspect="1"/>
+          </p:cNvPicPr>
+          <p:nvPr/>
+        </p:nvPicPr>
+        <p:blipFill>
+          <a:blip r:embed="rId2"/>
+          <a:stretch>
+            <a:fillRect/>
+          </a:stretch>
+        </p:blipFill>
+        <p:spPr>
+          <a:xfrm>
+            <a:off x="9038793" y="128016"/>
+            <a:ext cx="201168" cy="201168"/>
+          </a:xfrm>
+          <a:prstGeom prst="rect">
+            <a:avLst/>
+          </a:prstGeom>
+        </p:spPr>
+      </p:pic>
+      <p:sp>
+        <p:nvSpPr>
+          <p:cNvPr id="19" name="Text 15"/>
+          <p:cNvSpPr txBox="1"/>
+          <p:nvPr/>
+        </p:nvSpPr>
+        <p:spPr>
+          <a:xfrm>
+            <a:off x="9294825" y="91440"/>
+            <a:ext cx="2311654" cy="274320"/>
+          </a:xfrm>
+          <a:prstGeom prst="rect">
+            <a:avLst/>
+          </a:prstGeom>
+          <a:noFill/>
+          <a:ln/>
+        </p:spPr>
+        <p:txBody>
+          <a:bodyPr wrap="square" lIns="0" tIns="0" rIns="0" bIns="0" rtlCol="0" anchor="ctr"/>
+          <a:lstStyle/>
+          <a:p>
+            <a:pPr indent="0" marL="0">
+              <a:buNone/>
+            </a:pPr>
+            <a:r>
+              <a:rPr lang="en-US" sz="1100" b="1" dirty="0">
+                <a:solidFill>
+                  <a:srgbClr val="6B21A8"/>
+                </a:solidFill>
+                <a:latin typeface="Calibri" pitchFamily="34" charset="0"/>
+                <a:ea typeface="Calibri" pitchFamily="34" charset="-122"/>
+                <a:cs typeface="Calibri" pitchFamily="34" charset="-120"/>
+              </a:rPr>
+              <a:t>DA COMPRENDERE PIÙ AVANTI</a:t>
+            </a:r>
+            <a:endParaRPr lang="en-US" sz="1100" dirty="0"/>
+          </a:p>
+        </p:txBody>
+      </p:sp>
+      <p:sp>
+        <p:nvSpPr>
+          <p:cNvPr id="20" name="Shape 16"/>
+          <p:cNvSpPr/>
+          <p:nvPr/>
+        </p:nvSpPr>
+        <p:spPr>
+          <a:xfrm>
+            <a:off x="6675069" y="91440"/>
+            <a:ext cx="2125980" cy="274320"/>
+          </a:xfrm>
+          <a:prstGeom prst="rect">
+            <a:avLst/>
+          </a:prstGeom>
+          <a:solidFill>
+            <a:srgbClr val="FEF3C7"/>
+          </a:solidFill>
+          <a:ln w="12700">
+            <a:solidFill>
+              <a:srgbClr val="B45309"/>
+            </a:solidFill>
+            <a:prstDash val="solid"/>
+          </a:ln>
+        </p:spPr>
+      </p:sp>
+      <p:sp>
+        <p:nvSpPr>
+          <p:cNvPr id="21" name="Shape 17"/>
+          <p:cNvSpPr/>
+          <p:nvPr/>
+        </p:nvSpPr>
+        <p:spPr>
+          <a:xfrm>
+            <a:off x="6675069" y="91440"/>
+            <a:ext cx="27432" cy="274320"/>
+          </a:xfrm>
+          <a:prstGeom prst="rect">
+            <a:avLst/>
+          </a:prstGeom>
+          <a:solidFill>
+            <a:srgbClr val="B45309"/>
+          </a:solidFill>
+          <a:ln w="12700">
+            <a:solidFill>
+              <a:srgbClr val="B45309"/>
+            </a:solidFill>
+            <a:prstDash val="solid"/>
+          </a:ln>
+        </p:spPr>
+      </p:sp>
+      <p:sp>
+        <p:nvSpPr>
+          <p:cNvPr id="22" name="Shape 18"/>
+          <p:cNvSpPr/>
+          <p:nvPr/>
+        </p:nvSpPr>
+        <p:spPr>
+          <a:xfrm>
+            <a:off x="6729933" y="91440"/>
+            <a:ext cx="27432" cy="274320"/>
+          </a:xfrm>
+          <a:prstGeom prst="rect">
+            <a:avLst/>
+          </a:prstGeom>
+          <a:solidFill>
+            <a:srgbClr val="B45309"/>
+          </a:solidFill>
+          <a:ln w="12700">
+            <a:solidFill>
+              <a:srgbClr val="B45309"/>
+            </a:solidFill>
+            <a:prstDash val="solid"/>
+          </a:ln>
+        </p:spPr>
+      </p:sp>
+      <p:pic>
+        <p:nvPicPr>
+          <p:cNvPr id="23" name="Image 2" descr="preencoded.png">    </p:cNvPr>
+          <p:cNvPicPr>
+            <a:picLocks noChangeAspect="1"/>
+          </p:cNvPicPr>
+          <p:nvPr/>
+        </p:nvPicPr>
+        <p:blipFill>
+          <a:blip r:embed="rId3"/>
+          <a:stretch>
+            <a:fillRect/>
+          </a:stretch>
+        </p:blipFill>
+        <p:spPr>
+          <a:xfrm>
+            <a:off x="6803085" y="128016"/>
+            <a:ext cx="201168" cy="201168"/>
+          </a:xfrm>
+          <a:prstGeom prst="rect">
+            <a:avLst/>
+          </a:prstGeom>
+        </p:spPr>
+      </p:pic>
+      <p:sp>
+        <p:nvSpPr>
+          <p:cNvPr id="24" name="Text 19"/>
+          <p:cNvSpPr txBox="1"/>
+          <p:nvPr/>
+        </p:nvSpPr>
+        <p:spPr>
+          <a:xfrm>
+            <a:off x="7059117" y="91440"/>
+            <a:ext cx="1705356" cy="274320"/>
+          </a:xfrm>
+          <a:prstGeom prst="rect">
+            <a:avLst/>
+          </a:prstGeom>
+          <a:noFill/>
+          <a:ln/>
+        </p:spPr>
+        <p:txBody>
+          <a:bodyPr wrap="square" lIns="0" tIns="0" rIns="0" bIns="0" rtlCol="0" anchor="ctr"/>
+          <a:lstStyle/>
+          <a:p>
+            <a:pPr indent="0" marL="0">
+              <a:buNone/>
+            </a:pPr>
+            <a:r>
+              <a:rPr lang="en-US" sz="1100" b="1" dirty="0">
+                <a:solidFill>
+                  <a:srgbClr val="92400E"/>
+                </a:solidFill>
+                <a:latin typeface="Calibri" pitchFamily="34" charset="0"/>
+                <a:ea typeface="Calibri" pitchFamily="34" charset="-122"/>
+                <a:cs typeface="Calibri" pitchFamily="34" charset="-120"/>
+              </a:rPr>
+              <a:t>DA UTILIZZARE OGGI</a:t>
+            </a:r>
+            <a:endParaRPr lang="en-US" sz="1100" dirty="0"/>
+          </a:p>
+        </p:txBody>
+      </p:sp>
+      <p:sp>
+        <p:nvSpPr>
+          <p:cNvPr id="25" name="Shape 20"/>
+          <p:cNvSpPr/>
+          <p:nvPr/>
+        </p:nvSpPr>
+        <p:spPr>
+          <a:xfrm>
+            <a:off x="4352747" y="91440"/>
+            <a:ext cx="2212594" cy="274320"/>
+          </a:xfrm>
+          <a:prstGeom prst="rect">
+            <a:avLst/>
+          </a:prstGeom>
+          <a:solidFill>
+            <a:srgbClr val="E0F2FE"/>
+          </a:solidFill>
+          <a:ln w="12700">
+            <a:solidFill>
+              <a:srgbClr val="0369A1"/>
+            </a:solidFill>
+            <a:prstDash val="solid"/>
+          </a:ln>
+        </p:spPr>
+      </p:sp>
+      <p:sp>
+        <p:nvSpPr>
+          <p:cNvPr id="26" name="Shape 21"/>
+          <p:cNvSpPr/>
+          <p:nvPr/>
+        </p:nvSpPr>
+        <p:spPr>
+          <a:xfrm>
+            <a:off x="4352747" y="91440"/>
+            <a:ext cx="73152" cy="274320"/>
+          </a:xfrm>
+          <a:prstGeom prst="rect">
+            <a:avLst/>
+          </a:prstGeom>
+          <a:solidFill>
+            <a:srgbClr val="0369A1"/>
+          </a:solidFill>
+          <a:ln w="12700">
+            <a:solidFill>
+              <a:srgbClr val="0369A1"/>
+            </a:solidFill>
+            <a:prstDash val="solid"/>
+          </a:ln>
+        </p:spPr>
+      </p:sp>
+      <p:pic>
+        <p:nvPicPr>
+          <p:cNvPr id="27" name="Image 3" descr="preencoded.png">    </p:cNvPr>
+          <p:cNvPicPr>
+            <a:picLocks noChangeAspect="1"/>
+          </p:cNvPicPr>
+          <p:nvPr/>
+        </p:nvPicPr>
+        <p:blipFill>
+          <a:blip r:embed="rId4"/>
+          <a:stretch>
+            <a:fillRect/>
+          </a:stretch>
+        </p:blipFill>
+        <p:spPr>
+          <a:xfrm>
+            <a:off x="4480763" y="128016"/>
+            <a:ext cx="201168" cy="201168"/>
+          </a:xfrm>
+          <a:prstGeom prst="rect">
+            <a:avLst/>
+          </a:prstGeom>
+        </p:spPr>
+      </p:pic>
+      <p:sp>
+        <p:nvSpPr>
+          <p:cNvPr id="28" name="Text 22"/>
+          <p:cNvSpPr txBox="1"/>
+          <p:nvPr/>
+        </p:nvSpPr>
+        <p:spPr>
+          <a:xfrm>
+            <a:off x="4736795" y="91440"/>
+            <a:ext cx="1791970" cy="274320"/>
+          </a:xfrm>
+          <a:prstGeom prst="rect">
+            <a:avLst/>
+          </a:prstGeom>
+          <a:noFill/>
+          <a:ln/>
+        </p:spPr>
+        <p:txBody>
+          <a:bodyPr wrap="square" lIns="0" tIns="0" rIns="0" bIns="0" rtlCol="0" anchor="ctr"/>
+          <a:lstStyle/>
+          <a:p>
+            <a:pPr indent="0" marL="0">
+              <a:buNone/>
+            </a:pPr>
+            <a:r>
+              <a:rPr lang="en-US" sz="1100" b="1" dirty="0">
+                <a:solidFill>
+                  <a:srgbClr val="075985"/>
+                </a:solidFill>
+                <a:latin typeface="Calibri" pitchFamily="34" charset="0"/>
+                <a:ea typeface="Calibri" pitchFamily="34" charset="-122"/>
+                <a:cs typeface="Calibri" pitchFamily="34" charset="-120"/>
+              </a:rPr>
+              <a:t>DA COMPRENDERE OGGI</a:t>
+            </a:r>
+            <a:endParaRPr lang="en-US" sz="1100" dirty="0"/>
+          </a:p>
+        </p:txBody>
+      </p:sp>
+      <p:sp>
+        <p:nvSpPr>
           <p:cNvPr id="25" name="Slide Number Placeholder 0"/>
           <p:cNvSpPr>
             <a:spLocks noGrp="1"/>
@@ -3545,6 +3970,158 @@
       </p:sp>
       <p:sp>
         <p:nvSpPr>
+          <p:cNvPr id="17" name="Shape 15"/>
+          <p:cNvSpPr/>
+          <p:nvPr/>
+        </p:nvSpPr>
+        <p:spPr>
+          <a:xfrm>
+            <a:off x="7875600" y="91440"/>
+            <a:ext cx="3767455" cy="274320"/>
+          </a:xfrm>
+          <a:prstGeom prst="rect">
+            <a:avLst/>
+          </a:prstGeom>
+          <a:solidFill>
+            <a:srgbClr val="FEF3C7"/>
+          </a:solidFill>
+          <a:ln w="12700">
+            <a:solidFill>
+              <a:srgbClr val="B45309"/>
+            </a:solidFill>
+            <a:prstDash val="solid"/>
+          </a:ln>
+        </p:spPr>
+      </p:sp>
+      <p:sp>
+        <p:nvSpPr>
+          <p:cNvPr id="18" name="Shape 16"/>
+          <p:cNvSpPr/>
+          <p:nvPr/>
+        </p:nvSpPr>
+        <p:spPr>
+          <a:xfrm>
+            <a:off x="7875600" y="91440"/>
+            <a:ext cx="27432" cy="274320"/>
+          </a:xfrm>
+          <a:prstGeom prst="rect">
+            <a:avLst/>
+          </a:prstGeom>
+          <a:solidFill>
+            <a:srgbClr val="B45309"/>
+          </a:solidFill>
+          <a:ln w="12700">
+            <a:solidFill>
+              <a:srgbClr val="B45309"/>
+            </a:solidFill>
+            <a:prstDash val="solid"/>
+          </a:ln>
+        </p:spPr>
+      </p:sp>
+      <p:sp>
+        <p:nvSpPr>
+          <p:cNvPr id="19" name="Shape 17"/>
+          <p:cNvSpPr/>
+          <p:nvPr/>
+        </p:nvSpPr>
+        <p:spPr>
+          <a:xfrm>
+            <a:off x="7930464" y="91440"/>
+            <a:ext cx="27432" cy="274320"/>
+          </a:xfrm>
+          <a:prstGeom prst="rect">
+            <a:avLst/>
+          </a:prstGeom>
+          <a:solidFill>
+            <a:srgbClr val="B45309"/>
+          </a:solidFill>
+          <a:ln w="12700">
+            <a:solidFill>
+              <a:srgbClr val="B45309"/>
+            </a:solidFill>
+            <a:prstDash val="solid"/>
+          </a:ln>
+        </p:spPr>
+      </p:sp>
+      <p:pic>
+        <p:nvPicPr>
+          <p:cNvPr id="20" name="Image 0" descr="preencoded.png">    </p:cNvPr>
+          <p:cNvPicPr>
+            <a:picLocks noChangeAspect="1"/>
+          </p:cNvPicPr>
+          <p:nvPr/>
+        </p:nvPicPr>
+        <p:blipFill>
+          <a:blip r:embed="rId1"/>
+          <a:stretch>
+            <a:fillRect/>
+          </a:stretch>
+        </p:blipFill>
+        <p:spPr>
+          <a:xfrm>
+            <a:off x="8003616" y="128016"/>
+            <a:ext cx="201168" cy="201168"/>
+          </a:xfrm>
+          <a:prstGeom prst="rect">
+            <a:avLst/>
+          </a:prstGeom>
+        </p:spPr>
+      </p:pic>
+      <p:sp>
+        <p:nvSpPr>
+          <p:cNvPr id="21" name="Text 18"/>
+          <p:cNvSpPr txBox="1"/>
+          <p:nvPr/>
+        </p:nvSpPr>
+        <p:spPr>
+          <a:xfrm>
+            <a:off x="8259648" y="91440"/>
+            <a:ext cx="3346831" cy="274320"/>
+          </a:xfrm>
+          <a:prstGeom prst="rect">
+            <a:avLst/>
+          </a:prstGeom>
+          <a:noFill/>
+          <a:ln/>
+        </p:spPr>
+        <p:txBody>
+          <a:bodyPr wrap="square" lIns="0" tIns="0" rIns="0" bIns="0" rtlCol="0" anchor="ctr"/>
+          <a:lstStyle/>
+          <a:p>
+            <a:pPr indent="0" marL="0">
+              <a:buNone/>
+            </a:pPr>
+            <a:r>
+              <a:rPr lang="en-US" sz="1100" b="1" dirty="0">
+                <a:solidFill>
+                  <a:srgbClr val="92400E"/>
+                </a:solidFill>
+                <a:latin typeface="Calibri" pitchFamily="34" charset="0"/>
+                <a:ea typeface="Calibri" pitchFamily="34" charset="-122"/>
+                <a:cs typeface="Calibri" pitchFamily="34" charset="-120"/>
+              </a:rPr>
+              <a:t>DA UTILIZZARE OGGI</a:t>
+            </a:r>
+            <a:pPr indent="0" marL="0">
+              <a:buNone/>
+            </a:pPr>
+            <a:r>
+              <a:rPr lang="en-US" sz="1100" dirty="0">
+                <a:solidFill>
+                  <a:srgbClr val="92400E"/>
+                </a:solidFill>
+                <a:latin typeface="Calibri" pitchFamily="34" charset="0"/>
+                <a:ea typeface="Calibri" pitchFamily="34" charset="-122"/>
+                <a:cs typeface="Calibri" pitchFamily="34" charset="-120"/>
+              </a:rPr>
+              <a:t> · gli strumenti di PRG32</a:t>
+            </a:r>
+            <a:endParaRPr lang="en-US" sz="1100" dirty="0"/>
+          </a:p>
+        </p:txBody>
+      </p:sp>
+      <p:sp>
+        <p:nvSpPr>
           <p:cNvPr id="25" name="Slide Number Placeholder 0"/>
           <p:cNvSpPr>
             <a:spLocks noGrp="1"/>
@@ -4374,6 +4951,158 @@
                 <a:cs typeface="Calibri" pitchFamily="34" charset="-120"/>
               </a:rPr>
               <a:t>Schermo nero: confrontate il cablaggio del display con il firmware</a:t>
+            </a:r>
+            <a:endParaRPr lang="en-US" sz="1100" dirty="0"/>
+          </a:p>
+        </p:txBody>
+      </p:sp>
+      <p:sp>
+        <p:nvSpPr>
+          <p:cNvPr id="17" name="Shape 15"/>
+          <p:cNvSpPr/>
+          <p:nvPr/>
+        </p:nvSpPr>
+        <p:spPr>
+          <a:xfrm>
+            <a:off x="7875600" y="91440"/>
+            <a:ext cx="3767455" cy="274320"/>
+          </a:xfrm>
+          <a:prstGeom prst="rect">
+            <a:avLst/>
+          </a:prstGeom>
+          <a:solidFill>
+            <a:srgbClr val="FEF3C7"/>
+          </a:solidFill>
+          <a:ln w="12700">
+            <a:solidFill>
+              <a:srgbClr val="B45309"/>
+            </a:solidFill>
+            <a:prstDash val="solid"/>
+          </a:ln>
+        </p:spPr>
+      </p:sp>
+      <p:sp>
+        <p:nvSpPr>
+          <p:cNvPr id="18" name="Shape 16"/>
+          <p:cNvSpPr/>
+          <p:nvPr/>
+        </p:nvSpPr>
+        <p:spPr>
+          <a:xfrm>
+            <a:off x="7875600" y="91440"/>
+            <a:ext cx="27432" cy="274320"/>
+          </a:xfrm>
+          <a:prstGeom prst="rect">
+            <a:avLst/>
+          </a:prstGeom>
+          <a:solidFill>
+            <a:srgbClr val="B45309"/>
+          </a:solidFill>
+          <a:ln w="12700">
+            <a:solidFill>
+              <a:srgbClr val="B45309"/>
+            </a:solidFill>
+            <a:prstDash val="solid"/>
+          </a:ln>
+        </p:spPr>
+      </p:sp>
+      <p:sp>
+        <p:nvSpPr>
+          <p:cNvPr id="19" name="Shape 17"/>
+          <p:cNvSpPr/>
+          <p:nvPr/>
+        </p:nvSpPr>
+        <p:spPr>
+          <a:xfrm>
+            <a:off x="7930464" y="91440"/>
+            <a:ext cx="27432" cy="274320"/>
+          </a:xfrm>
+          <a:prstGeom prst="rect">
+            <a:avLst/>
+          </a:prstGeom>
+          <a:solidFill>
+            <a:srgbClr val="B45309"/>
+          </a:solidFill>
+          <a:ln w="12700">
+            <a:solidFill>
+              <a:srgbClr val="B45309"/>
+            </a:solidFill>
+            <a:prstDash val="solid"/>
+          </a:ln>
+        </p:spPr>
+      </p:sp>
+      <p:pic>
+        <p:nvPicPr>
+          <p:cNvPr id="20" name="Image 0" descr="preencoded.png">    </p:cNvPr>
+          <p:cNvPicPr>
+            <a:picLocks noChangeAspect="1"/>
+          </p:cNvPicPr>
+          <p:nvPr/>
+        </p:nvPicPr>
+        <p:blipFill>
+          <a:blip r:embed="rId1"/>
+          <a:stretch>
+            <a:fillRect/>
+          </a:stretch>
+        </p:blipFill>
+        <p:spPr>
+          <a:xfrm>
+            <a:off x="8003616" y="128016"/>
+            <a:ext cx="201168" cy="201168"/>
+          </a:xfrm>
+          <a:prstGeom prst="rect">
+            <a:avLst/>
+          </a:prstGeom>
+        </p:spPr>
+      </p:pic>
+      <p:sp>
+        <p:nvSpPr>
+          <p:cNvPr id="21" name="Text 18"/>
+          <p:cNvSpPr txBox="1"/>
+          <p:nvPr/>
+        </p:nvSpPr>
+        <p:spPr>
+          <a:xfrm>
+            <a:off x="8259648" y="91440"/>
+            <a:ext cx="3346831" cy="274320"/>
+          </a:xfrm>
+          <a:prstGeom prst="rect">
+            <a:avLst/>
+          </a:prstGeom>
+          <a:noFill/>
+          <a:ln/>
+        </p:spPr>
+        <p:txBody>
+          <a:bodyPr wrap="square" lIns="0" tIns="0" rIns="0" bIns="0" rtlCol="0" anchor="ctr"/>
+          <a:lstStyle/>
+          <a:p>
+            <a:pPr indent="0" marL="0">
+              <a:buNone/>
+            </a:pPr>
+            <a:r>
+              <a:rPr lang="en-US" sz="1100" b="1" dirty="0">
+                <a:solidFill>
+                  <a:srgbClr val="92400E"/>
+                </a:solidFill>
+                <a:latin typeface="Calibri" pitchFamily="34" charset="0"/>
+                <a:ea typeface="Calibri" pitchFamily="34" charset="-122"/>
+                <a:cs typeface="Calibri" pitchFamily="34" charset="-120"/>
+              </a:rPr>
+              <a:t>DA UTILIZZARE OGGI</a:t>
+            </a:r>
+            <a:pPr indent="0" marL="0">
+              <a:buNone/>
+            </a:pPr>
+            <a:r>
+              <a:rPr lang="en-US" sz="1100" dirty="0">
+                <a:solidFill>
+                  <a:srgbClr val="92400E"/>
+                </a:solidFill>
+                <a:latin typeface="Calibri" pitchFamily="34" charset="0"/>
+                <a:ea typeface="Calibri" pitchFamily="34" charset="-122"/>
+                <a:cs typeface="Calibri" pitchFamily="34" charset="-120"/>
+              </a:rPr>
+              <a:t> · gli strumenti di PRG32</a:t>
             </a:r>
             <a:endParaRPr lang="en-US" sz="1100" dirty="0"/>
           </a:p>
@@ -5762,6 +6491,158 @@
       </p:graphicFrame>
       <p:sp>
         <p:nvSpPr>
+          <p:cNvPr id="4" name="Shape 1"/>
+          <p:cNvSpPr/>
+          <p:nvPr/>
+        </p:nvSpPr>
+        <p:spPr>
+          <a:xfrm>
+            <a:off x="7875600" y="91440"/>
+            <a:ext cx="3767455" cy="274320"/>
+          </a:xfrm>
+          <a:prstGeom prst="rect">
+            <a:avLst/>
+          </a:prstGeom>
+          <a:solidFill>
+            <a:srgbClr val="FEF3C7"/>
+          </a:solidFill>
+          <a:ln w="12700">
+            <a:solidFill>
+              <a:srgbClr val="B45309"/>
+            </a:solidFill>
+            <a:prstDash val="solid"/>
+          </a:ln>
+        </p:spPr>
+      </p:sp>
+      <p:sp>
+        <p:nvSpPr>
+          <p:cNvPr id="5" name="Shape 2"/>
+          <p:cNvSpPr/>
+          <p:nvPr/>
+        </p:nvSpPr>
+        <p:spPr>
+          <a:xfrm>
+            <a:off x="7875600" y="91440"/>
+            <a:ext cx="27432" cy="274320"/>
+          </a:xfrm>
+          <a:prstGeom prst="rect">
+            <a:avLst/>
+          </a:prstGeom>
+          <a:solidFill>
+            <a:srgbClr val="B45309"/>
+          </a:solidFill>
+          <a:ln w="12700">
+            <a:solidFill>
+              <a:srgbClr val="B45309"/>
+            </a:solidFill>
+            <a:prstDash val="solid"/>
+          </a:ln>
+        </p:spPr>
+      </p:sp>
+      <p:sp>
+        <p:nvSpPr>
+          <p:cNvPr id="6" name="Shape 3"/>
+          <p:cNvSpPr/>
+          <p:nvPr/>
+        </p:nvSpPr>
+        <p:spPr>
+          <a:xfrm>
+            <a:off x="7930464" y="91440"/>
+            <a:ext cx="27432" cy="274320"/>
+          </a:xfrm>
+          <a:prstGeom prst="rect">
+            <a:avLst/>
+          </a:prstGeom>
+          <a:solidFill>
+            <a:srgbClr val="B45309"/>
+          </a:solidFill>
+          <a:ln w="12700">
+            <a:solidFill>
+              <a:srgbClr val="B45309"/>
+            </a:solidFill>
+            <a:prstDash val="solid"/>
+          </a:ln>
+        </p:spPr>
+      </p:sp>
+      <p:pic>
+        <p:nvPicPr>
+          <p:cNvPr id="7" name="Image 0" descr="preencoded.png">    </p:cNvPr>
+          <p:cNvPicPr>
+            <a:picLocks noChangeAspect="1"/>
+          </p:cNvPicPr>
+          <p:nvPr/>
+        </p:nvPicPr>
+        <p:blipFill>
+          <a:blip r:embed="rId1"/>
+          <a:stretch>
+            <a:fillRect/>
+          </a:stretch>
+        </p:blipFill>
+        <p:spPr>
+          <a:xfrm>
+            <a:off x="8003616" y="128016"/>
+            <a:ext cx="201168" cy="201168"/>
+          </a:xfrm>
+          <a:prstGeom prst="rect">
+            <a:avLst/>
+          </a:prstGeom>
+        </p:spPr>
+      </p:pic>
+      <p:sp>
+        <p:nvSpPr>
+          <p:cNvPr id="8" name="Text 4"/>
+          <p:cNvSpPr txBox="1"/>
+          <p:nvPr/>
+        </p:nvSpPr>
+        <p:spPr>
+          <a:xfrm>
+            <a:off x="8259648" y="91440"/>
+            <a:ext cx="3346831" cy="274320"/>
+          </a:xfrm>
+          <a:prstGeom prst="rect">
+            <a:avLst/>
+          </a:prstGeom>
+          <a:noFill/>
+          <a:ln/>
+        </p:spPr>
+        <p:txBody>
+          <a:bodyPr wrap="square" lIns="0" tIns="0" rIns="0" bIns="0" rtlCol="0" anchor="ctr"/>
+          <a:lstStyle/>
+          <a:p>
+            <a:pPr indent="0" marL="0">
+              <a:buNone/>
+            </a:pPr>
+            <a:r>
+              <a:rPr lang="en-US" sz="1100" b="1" dirty="0">
+                <a:solidFill>
+                  <a:srgbClr val="92400E"/>
+                </a:solidFill>
+                <a:latin typeface="Calibri" pitchFamily="34" charset="0"/>
+                <a:ea typeface="Calibri" pitchFamily="34" charset="-122"/>
+                <a:cs typeface="Calibri" pitchFamily="34" charset="-120"/>
+              </a:rPr>
+              <a:t>DA UTILIZZARE OGGI</a:t>
+            </a:r>
+            <a:pPr indent="0" marL="0">
+              <a:buNone/>
+            </a:pPr>
+            <a:r>
+              <a:rPr lang="en-US" sz="1100" dirty="0">
+                <a:solidFill>
+                  <a:srgbClr val="92400E"/>
+                </a:solidFill>
+                <a:latin typeface="Calibri" pitchFamily="34" charset="0"/>
+                <a:ea typeface="Calibri" pitchFamily="34" charset="-122"/>
+                <a:cs typeface="Calibri" pitchFamily="34" charset="-120"/>
+              </a:rPr>
+              <a:t> · gli strumenti di PRG32</a:t>
+            </a:r>
+            <a:endParaRPr lang="en-US" sz="1100" dirty="0"/>
+          </a:p>
+        </p:txBody>
+      </p:sp>
+      <p:sp>
+        <p:nvSpPr>
           <p:cNvPr id="25" name="Slide Number Placeholder 0"/>
           <p:cNvSpPr>
             <a:spLocks noGrp="1"/>
@@ -7795,6 +8676,299 @@
       </p:sp>
       <p:sp>
         <p:nvSpPr>
+          <p:cNvPr id="17" name="Shape 15"/>
+          <p:cNvSpPr/>
+          <p:nvPr/>
+        </p:nvSpPr>
+        <p:spPr>
+          <a:xfrm>
+            <a:off x="6650431" y="91440"/>
+            <a:ext cx="4992624" cy="274320"/>
+          </a:xfrm>
+          <a:prstGeom prst="rect">
+            <a:avLst/>
+          </a:prstGeom>
+          <a:solidFill>
+            <a:srgbClr val="FEF3C7"/>
+          </a:solidFill>
+          <a:ln w="12700">
+            <a:solidFill>
+              <a:srgbClr val="B45309"/>
+            </a:solidFill>
+            <a:prstDash val="solid"/>
+          </a:ln>
+        </p:spPr>
+      </p:sp>
+      <p:sp>
+        <p:nvSpPr>
+          <p:cNvPr id="18" name="Shape 16"/>
+          <p:cNvSpPr/>
+          <p:nvPr/>
+        </p:nvSpPr>
+        <p:spPr>
+          <a:xfrm>
+            <a:off x="6650431" y="91440"/>
+            <a:ext cx="27432" cy="274320"/>
+          </a:xfrm>
+          <a:prstGeom prst="rect">
+            <a:avLst/>
+          </a:prstGeom>
+          <a:solidFill>
+            <a:srgbClr val="B45309"/>
+          </a:solidFill>
+          <a:ln w="12700">
+            <a:solidFill>
+              <a:srgbClr val="B45309"/>
+            </a:solidFill>
+            <a:prstDash val="solid"/>
+          </a:ln>
+        </p:spPr>
+      </p:sp>
+      <p:sp>
+        <p:nvSpPr>
+          <p:cNvPr id="19" name="Shape 17"/>
+          <p:cNvSpPr/>
+          <p:nvPr/>
+        </p:nvSpPr>
+        <p:spPr>
+          <a:xfrm>
+            <a:off x="6705295" y="91440"/>
+            <a:ext cx="27432" cy="274320"/>
+          </a:xfrm>
+          <a:prstGeom prst="rect">
+            <a:avLst/>
+          </a:prstGeom>
+          <a:solidFill>
+            <a:srgbClr val="B45309"/>
+          </a:solidFill>
+          <a:ln w="12700">
+            <a:solidFill>
+              <a:srgbClr val="B45309"/>
+            </a:solidFill>
+            <a:prstDash val="solid"/>
+          </a:ln>
+        </p:spPr>
+      </p:sp>
+      <p:pic>
+        <p:nvPicPr>
+          <p:cNvPr id="20" name="Image 0" descr="preencoded.png">    </p:cNvPr>
+          <p:cNvPicPr>
+            <a:picLocks noChangeAspect="1"/>
+          </p:cNvPicPr>
+          <p:nvPr/>
+        </p:nvPicPr>
+        <p:blipFill>
+          <a:blip r:embed="rId1"/>
+          <a:stretch>
+            <a:fillRect/>
+          </a:stretch>
+        </p:blipFill>
+        <p:spPr>
+          <a:xfrm>
+            <a:off x="6778447" y="128016"/>
+            <a:ext cx="201168" cy="201168"/>
+          </a:xfrm>
+          <a:prstGeom prst="rect">
+            <a:avLst/>
+          </a:prstGeom>
+        </p:spPr>
+      </p:pic>
+      <p:sp>
+        <p:nvSpPr>
+          <p:cNvPr id="21" name="Text 18"/>
+          <p:cNvSpPr txBox="1"/>
+          <p:nvPr/>
+        </p:nvSpPr>
+        <p:spPr>
+          <a:xfrm>
+            <a:off x="7034479" y="91440"/>
+            <a:ext cx="4572000" cy="274320"/>
+          </a:xfrm>
+          <a:prstGeom prst="rect">
+            <a:avLst/>
+          </a:prstGeom>
+          <a:noFill/>
+          <a:ln/>
+        </p:spPr>
+        <p:txBody>
+          <a:bodyPr wrap="square" lIns="0" tIns="0" rIns="0" bIns="0" rtlCol="0" anchor="ctr"/>
+          <a:lstStyle/>
+          <a:p>
+            <a:pPr indent="0" marL="0">
+              <a:buNone/>
+            </a:pPr>
+            <a:r>
+              <a:rPr lang="en-US" sz="1100" b="1" dirty="0">
+                <a:solidFill>
+                  <a:srgbClr val="92400E"/>
+                </a:solidFill>
+                <a:latin typeface="Calibri" pitchFamily="34" charset="0"/>
+                <a:ea typeface="Calibri" pitchFamily="34" charset="-122"/>
+                <a:cs typeface="Calibri" pitchFamily="34" charset="-120"/>
+              </a:rPr>
+              <a:t>DA UTILIZZARE OGGI</a:t>
+            </a:r>
+            <a:pPr indent="0" marL="0">
+              <a:buNone/>
+            </a:pPr>
+            <a:r>
+              <a:rPr lang="en-US" sz="1100" dirty="0">
+                <a:solidFill>
+                  <a:srgbClr val="92400E"/>
+                </a:solidFill>
+                <a:latin typeface="Calibri" pitchFamily="34" charset="0"/>
+                <a:ea typeface="Calibri" pitchFamily="34" charset="-122"/>
+                <a:cs typeface="Calibri" pitchFamily="34" charset="-120"/>
+              </a:rPr>
+              <a:t> · shift come moltiplicazione</a:t>
+            </a:r>
+            <a:pPr indent="0" marL="0">
+              <a:buNone/>
+            </a:pPr>
+            <a:r>
+              <a:rPr lang="en-US" sz="1100" b="1" dirty="0">
+                <a:solidFill>
+                  <a:srgbClr val="92400E"/>
+                </a:solidFill>
+                <a:latin typeface="Calibri" pitchFamily="34" charset="0"/>
+                <a:ea typeface="Calibri" pitchFamily="34" charset="-122"/>
+                <a:cs typeface="Calibri" pitchFamily="34" charset="-120"/>
+              </a:rPr>
+              <a:t> → Lezione 05</a:t>
+            </a:r>
+            <a:endParaRPr lang="en-US" sz="1100" dirty="0"/>
+          </a:p>
+        </p:txBody>
+      </p:sp>
+      <p:sp>
+        <p:nvSpPr>
+          <p:cNvPr id="22" name="Shape 19"/>
+          <p:cNvSpPr/>
+          <p:nvPr/>
+        </p:nvSpPr>
+        <p:spPr>
+          <a:xfrm>
+            <a:off x="2817952" y="91440"/>
+            <a:ext cx="3722751" cy="274320"/>
+          </a:xfrm>
+          <a:prstGeom prst="rect">
+            <a:avLst/>
+          </a:prstGeom>
+          <a:solidFill>
+            <a:srgbClr val="E0F2FE"/>
+          </a:solidFill>
+          <a:ln w="12700">
+            <a:solidFill>
+              <a:srgbClr val="0369A1"/>
+            </a:solidFill>
+            <a:prstDash val="solid"/>
+          </a:ln>
+        </p:spPr>
+      </p:sp>
+      <p:sp>
+        <p:nvSpPr>
+          <p:cNvPr id="23" name="Shape 20"/>
+          <p:cNvSpPr/>
+          <p:nvPr/>
+        </p:nvSpPr>
+        <p:spPr>
+          <a:xfrm>
+            <a:off x="2817952" y="91440"/>
+            <a:ext cx="73152" cy="274320"/>
+          </a:xfrm>
+          <a:prstGeom prst="rect">
+            <a:avLst/>
+          </a:prstGeom>
+          <a:solidFill>
+            <a:srgbClr val="0369A1"/>
+          </a:solidFill>
+          <a:ln w="12700">
+            <a:solidFill>
+              <a:srgbClr val="0369A1"/>
+            </a:solidFill>
+            <a:prstDash val="solid"/>
+          </a:ln>
+        </p:spPr>
+      </p:sp>
+      <p:pic>
+        <p:nvPicPr>
+          <p:cNvPr id="24" name="Image 1" descr="preencoded.png">    </p:cNvPr>
+          <p:cNvPicPr>
+            <a:picLocks noChangeAspect="1"/>
+          </p:cNvPicPr>
+          <p:nvPr/>
+        </p:nvPicPr>
+        <p:blipFill>
+          <a:blip r:embed="rId2"/>
+          <a:stretch>
+            <a:fillRect/>
+          </a:stretch>
+        </p:blipFill>
+        <p:spPr>
+          <a:xfrm>
+            <a:off x="2945968" y="128016"/>
+            <a:ext cx="201168" cy="201168"/>
+          </a:xfrm>
+          <a:prstGeom prst="rect">
+            <a:avLst/>
+          </a:prstGeom>
+        </p:spPr>
+      </p:pic>
+      <p:sp>
+        <p:nvSpPr>
+          <p:cNvPr id="25" name="Text 21"/>
+          <p:cNvSpPr txBox="1"/>
+          <p:nvPr/>
+        </p:nvSpPr>
+        <p:spPr>
+          <a:xfrm>
+            <a:off x="3202000" y="91440"/>
+            <a:ext cx="3302127" cy="274320"/>
+          </a:xfrm>
+          <a:prstGeom prst="rect">
+            <a:avLst/>
+          </a:prstGeom>
+          <a:noFill/>
+          <a:ln/>
+        </p:spPr>
+        <p:txBody>
+          <a:bodyPr wrap="square" lIns="0" tIns="0" rIns="0" bIns="0" rtlCol="0" anchor="ctr"/>
+          <a:lstStyle/>
+          <a:p>
+            <a:pPr indent="0" marL="0">
+              <a:buNone/>
+            </a:pPr>
+            <a:r>
+              <a:rPr lang="en-US" sz="1100" b="1" dirty="0">
+                <a:solidFill>
+                  <a:srgbClr val="075985"/>
+                </a:solidFill>
+                <a:latin typeface="Calibri" pitchFamily="34" charset="0"/>
+                <a:ea typeface="Calibri" pitchFamily="34" charset="-122"/>
+                <a:cs typeface="Calibri" pitchFamily="34" charset="-120"/>
+              </a:rPr>
+              <a:t>DA COMPRENDERE OGGI</a:t>
+            </a:r>
+            <a:pPr indent="0" marL="0">
+              <a:buNone/>
+            </a:pPr>
+            <a:r>
+              <a:rPr lang="en-US" sz="1100" dirty="0">
+                <a:solidFill>
+                  <a:srgbClr val="075985"/>
+                </a:solidFill>
+                <a:latin typeface="Calibri" pitchFamily="34" charset="0"/>
+                <a:ea typeface="Calibri" pitchFamily="34" charset="-122"/>
+                <a:cs typeface="Calibri" pitchFamily="34" charset="-120"/>
+              </a:rPr>
+              <a:t> · gli array in memoria</a:t>
+            </a:r>
+            <a:endParaRPr lang="en-US" sz="1100" dirty="0"/>
+          </a:p>
+        </p:txBody>
+      </p:sp>
+      <p:sp>
+        <p:nvSpPr>
           <p:cNvPr id="25" name="Slide Number Placeholder 0"/>
           <p:cNvSpPr>
             <a:spLocks noGrp="1"/>
@@ -8518,6 +9692,133 @@
       </p:sp>
       <p:sp>
         <p:nvSpPr>
+          <p:cNvPr id="14" name="Shape 12"/>
+          <p:cNvSpPr/>
+          <p:nvPr/>
+        </p:nvSpPr>
+        <p:spPr>
+          <a:xfrm>
+            <a:off x="8379917" y="91440"/>
+            <a:ext cx="3263138" cy="274320"/>
+          </a:xfrm>
+          <a:prstGeom prst="rect">
+            <a:avLst/>
+          </a:prstGeom>
+          <a:solidFill>
+            <a:srgbClr val="E0F2FE"/>
+          </a:solidFill>
+          <a:ln w="12700">
+            <a:solidFill>
+              <a:srgbClr val="0369A1"/>
+            </a:solidFill>
+            <a:prstDash val="solid"/>
+          </a:ln>
+        </p:spPr>
+      </p:sp>
+      <p:sp>
+        <p:nvSpPr>
+          <p:cNvPr id="15" name="Shape 13"/>
+          <p:cNvSpPr/>
+          <p:nvPr/>
+        </p:nvSpPr>
+        <p:spPr>
+          <a:xfrm>
+            <a:off x="8379917" y="91440"/>
+            <a:ext cx="73152" cy="274320"/>
+          </a:xfrm>
+          <a:prstGeom prst="rect">
+            <a:avLst/>
+          </a:prstGeom>
+          <a:solidFill>
+            <a:srgbClr val="0369A1"/>
+          </a:solidFill>
+          <a:ln w="12700">
+            <a:solidFill>
+              <a:srgbClr val="0369A1"/>
+            </a:solidFill>
+            <a:prstDash val="solid"/>
+          </a:ln>
+        </p:spPr>
+      </p:sp>
+      <p:pic>
+        <p:nvPicPr>
+          <p:cNvPr id="16" name="Image 0" descr="preencoded.png">    </p:cNvPr>
+          <p:cNvPicPr>
+            <a:picLocks noChangeAspect="1"/>
+          </p:cNvPicPr>
+          <p:nvPr/>
+        </p:nvPicPr>
+        <p:blipFill>
+          <a:blip r:embed="rId1"/>
+          <a:stretch>
+            <a:fillRect/>
+          </a:stretch>
+        </p:blipFill>
+        <p:spPr>
+          <a:xfrm>
+            <a:off x="8507933" y="128016"/>
+            <a:ext cx="201168" cy="201168"/>
+          </a:xfrm>
+          <a:prstGeom prst="rect">
+            <a:avLst/>
+          </a:prstGeom>
+        </p:spPr>
+      </p:pic>
+      <p:sp>
+        <p:nvSpPr>
+          <p:cNvPr id="17" name="Text 14"/>
+          <p:cNvSpPr txBox="1"/>
+          <p:nvPr/>
+        </p:nvSpPr>
+        <p:spPr>
+          <a:xfrm>
+            <a:off x="8763965" y="91440"/>
+            <a:ext cx="2842514" cy="274320"/>
+          </a:xfrm>
+          <a:prstGeom prst="rect">
+            <a:avLst/>
+          </a:prstGeom>
+          <a:noFill/>
+          <a:ln/>
+        </p:spPr>
+        <p:txBody>
+          <a:bodyPr wrap="square" lIns="0" tIns="0" rIns="0" bIns="0" rtlCol="0" anchor="ctr"/>
+          <a:lstStyle/>
+          <a:p>
+            <a:pPr indent="0" marL="0">
+              <a:buNone/>
+            </a:pPr>
+            <a:r>
+              <a:rPr lang="en-US" sz="1100" b="1" dirty="0">
+                <a:solidFill>
+                  <a:srgbClr val="075985"/>
+                </a:solidFill>
+                <a:latin typeface="Calibri" pitchFamily="34" charset="0"/>
+                <a:ea typeface="Calibri" pitchFamily="34" charset="-122"/>
+                <a:cs typeface="Calibri" pitchFamily="34" charset="-120"/>
+              </a:rPr>
+              <a:t>DA COMPRENDERE OGGI</a:t>
+            </a:r>
+            <a:pPr indent="0" marL="0">
+              <a:buNone/>
+            </a:pPr>
+            <a:r>
+              <a:rPr lang="en-US" sz="1100" dirty="0">
+                <a:solidFill>
+                  <a:srgbClr val="075985"/>
+                </a:solidFill>
+                <a:latin typeface="Calibri" pitchFamily="34" charset="0"/>
+                <a:ea typeface="Calibri" pitchFamily="34" charset="-122"/>
+                <a:cs typeface="Calibri" pitchFamily="34" charset="-120"/>
+              </a:rPr>
+              <a:t> · gli algoritmi</a:t>
+            </a:r>
+            <a:endParaRPr lang="en-US" sz="1100" dirty="0"/>
+          </a:p>
+        </p:txBody>
+      </p:sp>
+      <p:sp>
+        <p:nvSpPr>
           <p:cNvPr id="25" name="Slide Number Placeholder 0"/>
           <p:cNvSpPr>
             <a:spLocks noGrp="1"/>
@@ -9072,6 +10373,158 @@
       </p:sp>
       <p:sp>
         <p:nvSpPr>
+          <p:cNvPr id="5" name="Shape 3"/>
+          <p:cNvSpPr/>
+          <p:nvPr/>
+        </p:nvSpPr>
+        <p:spPr>
+          <a:xfrm>
+            <a:off x="7941259" y="91440"/>
+            <a:ext cx="3701796" cy="274320"/>
+          </a:xfrm>
+          <a:prstGeom prst="rect">
+            <a:avLst/>
+          </a:prstGeom>
+          <a:solidFill>
+            <a:srgbClr val="FEF3C7"/>
+          </a:solidFill>
+          <a:ln w="12700">
+            <a:solidFill>
+              <a:srgbClr val="B45309"/>
+            </a:solidFill>
+            <a:prstDash val="solid"/>
+          </a:ln>
+        </p:spPr>
+      </p:sp>
+      <p:sp>
+        <p:nvSpPr>
+          <p:cNvPr id="6" name="Shape 4"/>
+          <p:cNvSpPr/>
+          <p:nvPr/>
+        </p:nvSpPr>
+        <p:spPr>
+          <a:xfrm>
+            <a:off x="7941259" y="91440"/>
+            <a:ext cx="27432" cy="274320"/>
+          </a:xfrm>
+          <a:prstGeom prst="rect">
+            <a:avLst/>
+          </a:prstGeom>
+          <a:solidFill>
+            <a:srgbClr val="B45309"/>
+          </a:solidFill>
+          <a:ln w="12700">
+            <a:solidFill>
+              <a:srgbClr val="B45309"/>
+            </a:solidFill>
+            <a:prstDash val="solid"/>
+          </a:ln>
+        </p:spPr>
+      </p:sp>
+      <p:sp>
+        <p:nvSpPr>
+          <p:cNvPr id="7" name="Shape 5"/>
+          <p:cNvSpPr/>
+          <p:nvPr/>
+        </p:nvSpPr>
+        <p:spPr>
+          <a:xfrm>
+            <a:off x="7996123" y="91440"/>
+            <a:ext cx="27432" cy="274320"/>
+          </a:xfrm>
+          <a:prstGeom prst="rect">
+            <a:avLst/>
+          </a:prstGeom>
+          <a:solidFill>
+            <a:srgbClr val="B45309"/>
+          </a:solidFill>
+          <a:ln w="12700">
+            <a:solidFill>
+              <a:srgbClr val="B45309"/>
+            </a:solidFill>
+            <a:prstDash val="solid"/>
+          </a:ln>
+        </p:spPr>
+      </p:sp>
+      <p:pic>
+        <p:nvPicPr>
+          <p:cNvPr id="8" name="Image 0" descr="preencoded.png">    </p:cNvPr>
+          <p:cNvPicPr>
+            <a:picLocks noChangeAspect="1"/>
+          </p:cNvPicPr>
+          <p:nvPr/>
+        </p:nvPicPr>
+        <p:blipFill>
+          <a:blip r:embed="rId1"/>
+          <a:stretch>
+            <a:fillRect/>
+          </a:stretch>
+        </p:blipFill>
+        <p:spPr>
+          <a:xfrm>
+            <a:off x="8069275" y="128016"/>
+            <a:ext cx="201168" cy="201168"/>
+          </a:xfrm>
+          <a:prstGeom prst="rect">
+            <a:avLst/>
+          </a:prstGeom>
+        </p:spPr>
+      </p:pic>
+      <p:sp>
+        <p:nvSpPr>
+          <p:cNvPr id="9" name="Text 6"/>
+          <p:cNvSpPr txBox="1"/>
+          <p:nvPr/>
+        </p:nvSpPr>
+        <p:spPr>
+          <a:xfrm>
+            <a:off x="8325307" y="91440"/>
+            <a:ext cx="3281172" cy="274320"/>
+          </a:xfrm>
+          <a:prstGeom prst="rect">
+            <a:avLst/>
+          </a:prstGeom>
+          <a:noFill/>
+          <a:ln/>
+        </p:spPr>
+        <p:txBody>
+          <a:bodyPr wrap="square" lIns="0" tIns="0" rIns="0" bIns="0" rtlCol="0" anchor="ctr"/>
+          <a:lstStyle/>
+          <a:p>
+            <a:pPr indent="0" marL="0">
+              <a:buNone/>
+            </a:pPr>
+            <a:r>
+              <a:rPr lang="en-US" sz="1100" b="1" dirty="0">
+                <a:solidFill>
+                  <a:srgbClr val="92400E"/>
+                </a:solidFill>
+                <a:latin typeface="Calibri" pitchFamily="34" charset="0"/>
+                <a:ea typeface="Calibri" pitchFamily="34" charset="-122"/>
+                <a:cs typeface="Calibri" pitchFamily="34" charset="-120"/>
+              </a:rPr>
+              <a:t>DA UTILIZZARE OGGI</a:t>
+            </a:r>
+            <a:pPr indent="0" marL="0">
+              <a:buNone/>
+            </a:pPr>
+            <a:r>
+              <a:rPr lang="en-US" sz="1100" dirty="0">
+                <a:solidFill>
+                  <a:srgbClr val="92400E"/>
+                </a:solidFill>
+                <a:latin typeface="Calibri" pitchFamily="34" charset="0"/>
+                <a:ea typeface="Calibri" pitchFamily="34" charset="-122"/>
+                <a:cs typeface="Calibri" pitchFamily="34" charset="-120"/>
+              </a:rPr>
+              <a:t> · il programma completo</a:t>
+            </a:r>
+            <a:endParaRPr lang="en-US" sz="1100" dirty="0"/>
+          </a:p>
+        </p:txBody>
+      </p:sp>
+      <p:sp>
+        <p:nvSpPr>
           <p:cNvPr id="25" name="Slide Number Placeholder 0"/>
           <p:cNvSpPr>
             <a:spLocks noGrp="1"/>
@@ -9797,6 +11250,158 @@
       </p:sp>
       <p:sp>
         <p:nvSpPr>
+          <p:cNvPr id="5" name="Shape 3"/>
+          <p:cNvSpPr/>
+          <p:nvPr/>
+        </p:nvSpPr>
+        <p:spPr>
+          <a:xfrm>
+            <a:off x="7941259" y="91440"/>
+            <a:ext cx="3701796" cy="274320"/>
+          </a:xfrm>
+          <a:prstGeom prst="rect">
+            <a:avLst/>
+          </a:prstGeom>
+          <a:solidFill>
+            <a:srgbClr val="FEF3C7"/>
+          </a:solidFill>
+          <a:ln w="12700">
+            <a:solidFill>
+              <a:srgbClr val="B45309"/>
+            </a:solidFill>
+            <a:prstDash val="solid"/>
+          </a:ln>
+        </p:spPr>
+      </p:sp>
+      <p:sp>
+        <p:nvSpPr>
+          <p:cNvPr id="6" name="Shape 4"/>
+          <p:cNvSpPr/>
+          <p:nvPr/>
+        </p:nvSpPr>
+        <p:spPr>
+          <a:xfrm>
+            <a:off x="7941259" y="91440"/>
+            <a:ext cx="27432" cy="274320"/>
+          </a:xfrm>
+          <a:prstGeom prst="rect">
+            <a:avLst/>
+          </a:prstGeom>
+          <a:solidFill>
+            <a:srgbClr val="B45309"/>
+          </a:solidFill>
+          <a:ln w="12700">
+            <a:solidFill>
+              <a:srgbClr val="B45309"/>
+            </a:solidFill>
+            <a:prstDash val="solid"/>
+          </a:ln>
+        </p:spPr>
+      </p:sp>
+      <p:sp>
+        <p:nvSpPr>
+          <p:cNvPr id="7" name="Shape 5"/>
+          <p:cNvSpPr/>
+          <p:nvPr/>
+        </p:nvSpPr>
+        <p:spPr>
+          <a:xfrm>
+            <a:off x="7996123" y="91440"/>
+            <a:ext cx="27432" cy="274320"/>
+          </a:xfrm>
+          <a:prstGeom prst="rect">
+            <a:avLst/>
+          </a:prstGeom>
+          <a:solidFill>
+            <a:srgbClr val="B45309"/>
+          </a:solidFill>
+          <a:ln w="12700">
+            <a:solidFill>
+              <a:srgbClr val="B45309"/>
+            </a:solidFill>
+            <a:prstDash val="solid"/>
+          </a:ln>
+        </p:spPr>
+      </p:sp>
+      <p:pic>
+        <p:nvPicPr>
+          <p:cNvPr id="8" name="Image 0" descr="preencoded.png">    </p:cNvPr>
+          <p:cNvPicPr>
+            <a:picLocks noChangeAspect="1"/>
+          </p:cNvPicPr>
+          <p:nvPr/>
+        </p:nvPicPr>
+        <p:blipFill>
+          <a:blip r:embed="rId1"/>
+          <a:stretch>
+            <a:fillRect/>
+          </a:stretch>
+        </p:blipFill>
+        <p:spPr>
+          <a:xfrm>
+            <a:off x="8069275" y="128016"/>
+            <a:ext cx="201168" cy="201168"/>
+          </a:xfrm>
+          <a:prstGeom prst="rect">
+            <a:avLst/>
+          </a:prstGeom>
+        </p:spPr>
+      </p:pic>
+      <p:sp>
+        <p:nvSpPr>
+          <p:cNvPr id="9" name="Text 6"/>
+          <p:cNvSpPr txBox="1"/>
+          <p:nvPr/>
+        </p:nvSpPr>
+        <p:spPr>
+          <a:xfrm>
+            <a:off x="8325307" y="91440"/>
+            <a:ext cx="3281172" cy="274320"/>
+          </a:xfrm>
+          <a:prstGeom prst="rect">
+            <a:avLst/>
+          </a:prstGeom>
+          <a:noFill/>
+          <a:ln/>
+        </p:spPr>
+        <p:txBody>
+          <a:bodyPr wrap="square" lIns="0" tIns="0" rIns="0" bIns="0" rtlCol="0" anchor="ctr"/>
+          <a:lstStyle/>
+          <a:p>
+            <a:pPr indent="0" marL="0">
+              <a:buNone/>
+            </a:pPr>
+            <a:r>
+              <a:rPr lang="en-US" sz="1100" b="1" dirty="0">
+                <a:solidFill>
+                  <a:srgbClr val="92400E"/>
+                </a:solidFill>
+                <a:latin typeface="Calibri" pitchFamily="34" charset="0"/>
+                <a:ea typeface="Calibri" pitchFamily="34" charset="-122"/>
+                <a:cs typeface="Calibri" pitchFamily="34" charset="-120"/>
+              </a:rPr>
+              <a:t>DA UTILIZZARE OGGI</a:t>
+            </a:r>
+            <a:pPr indent="0" marL="0">
+              <a:buNone/>
+            </a:pPr>
+            <a:r>
+              <a:rPr lang="en-US" sz="1100" dirty="0">
+                <a:solidFill>
+                  <a:srgbClr val="92400E"/>
+                </a:solidFill>
+                <a:latin typeface="Calibri" pitchFamily="34" charset="0"/>
+                <a:ea typeface="Calibri" pitchFamily="34" charset="-122"/>
+                <a:cs typeface="Calibri" pitchFamily="34" charset="-120"/>
+              </a:rPr>
+              <a:t> · il programma completo</a:t>
+            </a:r>
+            <a:endParaRPr lang="en-US" sz="1100" dirty="0"/>
+          </a:p>
+        </p:txBody>
+      </p:sp>
+      <p:sp>
+        <p:nvSpPr>
           <p:cNvPr id="25" name="Slide Number Placeholder 0"/>
           <p:cNvSpPr>
             <a:spLocks noGrp="1"/>
@@ -10110,6 +11715,158 @@
       </p:sp>
       <p:sp>
         <p:nvSpPr>
+          <p:cNvPr id="5" name="Shape 3"/>
+          <p:cNvSpPr/>
+          <p:nvPr/>
+        </p:nvSpPr>
+        <p:spPr>
+          <a:xfrm>
+            <a:off x="7941259" y="91440"/>
+            <a:ext cx="3701796" cy="274320"/>
+          </a:xfrm>
+          <a:prstGeom prst="rect">
+            <a:avLst/>
+          </a:prstGeom>
+          <a:solidFill>
+            <a:srgbClr val="FEF3C7"/>
+          </a:solidFill>
+          <a:ln w="12700">
+            <a:solidFill>
+              <a:srgbClr val="B45309"/>
+            </a:solidFill>
+            <a:prstDash val="solid"/>
+          </a:ln>
+        </p:spPr>
+      </p:sp>
+      <p:sp>
+        <p:nvSpPr>
+          <p:cNvPr id="6" name="Shape 4"/>
+          <p:cNvSpPr/>
+          <p:nvPr/>
+        </p:nvSpPr>
+        <p:spPr>
+          <a:xfrm>
+            <a:off x="7941259" y="91440"/>
+            <a:ext cx="27432" cy="274320"/>
+          </a:xfrm>
+          <a:prstGeom prst="rect">
+            <a:avLst/>
+          </a:prstGeom>
+          <a:solidFill>
+            <a:srgbClr val="B45309"/>
+          </a:solidFill>
+          <a:ln w="12700">
+            <a:solidFill>
+              <a:srgbClr val="B45309"/>
+            </a:solidFill>
+            <a:prstDash val="solid"/>
+          </a:ln>
+        </p:spPr>
+      </p:sp>
+      <p:sp>
+        <p:nvSpPr>
+          <p:cNvPr id="7" name="Shape 5"/>
+          <p:cNvSpPr/>
+          <p:nvPr/>
+        </p:nvSpPr>
+        <p:spPr>
+          <a:xfrm>
+            <a:off x="7996123" y="91440"/>
+            <a:ext cx="27432" cy="274320"/>
+          </a:xfrm>
+          <a:prstGeom prst="rect">
+            <a:avLst/>
+          </a:prstGeom>
+          <a:solidFill>
+            <a:srgbClr val="B45309"/>
+          </a:solidFill>
+          <a:ln w="12700">
+            <a:solidFill>
+              <a:srgbClr val="B45309"/>
+            </a:solidFill>
+            <a:prstDash val="solid"/>
+          </a:ln>
+        </p:spPr>
+      </p:sp>
+      <p:pic>
+        <p:nvPicPr>
+          <p:cNvPr id="8" name="Image 0" descr="preencoded.png">    </p:cNvPr>
+          <p:cNvPicPr>
+            <a:picLocks noChangeAspect="1"/>
+          </p:cNvPicPr>
+          <p:nvPr/>
+        </p:nvPicPr>
+        <p:blipFill>
+          <a:blip r:embed="rId1"/>
+          <a:stretch>
+            <a:fillRect/>
+          </a:stretch>
+        </p:blipFill>
+        <p:spPr>
+          <a:xfrm>
+            <a:off x="8069275" y="128016"/>
+            <a:ext cx="201168" cy="201168"/>
+          </a:xfrm>
+          <a:prstGeom prst="rect">
+            <a:avLst/>
+          </a:prstGeom>
+        </p:spPr>
+      </p:pic>
+      <p:sp>
+        <p:nvSpPr>
+          <p:cNvPr id="9" name="Text 6"/>
+          <p:cNvSpPr txBox="1"/>
+          <p:nvPr/>
+        </p:nvSpPr>
+        <p:spPr>
+          <a:xfrm>
+            <a:off x="8325307" y="91440"/>
+            <a:ext cx="3281172" cy="274320"/>
+          </a:xfrm>
+          <a:prstGeom prst="rect">
+            <a:avLst/>
+          </a:prstGeom>
+          <a:noFill/>
+          <a:ln/>
+        </p:spPr>
+        <p:txBody>
+          <a:bodyPr wrap="square" lIns="0" tIns="0" rIns="0" bIns="0" rtlCol="0" anchor="ctr"/>
+          <a:lstStyle/>
+          <a:p>
+            <a:pPr indent="0" marL="0">
+              <a:buNone/>
+            </a:pPr>
+            <a:r>
+              <a:rPr lang="en-US" sz="1100" b="1" dirty="0">
+                <a:solidFill>
+                  <a:srgbClr val="92400E"/>
+                </a:solidFill>
+                <a:latin typeface="Calibri" pitchFamily="34" charset="0"/>
+                <a:ea typeface="Calibri" pitchFamily="34" charset="-122"/>
+                <a:cs typeface="Calibri" pitchFamily="34" charset="-120"/>
+              </a:rPr>
+              <a:t>DA UTILIZZARE OGGI</a:t>
+            </a:r>
+            <a:pPr indent="0" marL="0">
+              <a:buNone/>
+            </a:pPr>
+            <a:r>
+              <a:rPr lang="en-US" sz="1100" dirty="0">
+                <a:solidFill>
+                  <a:srgbClr val="92400E"/>
+                </a:solidFill>
+                <a:latin typeface="Calibri" pitchFamily="34" charset="0"/>
+                <a:ea typeface="Calibri" pitchFamily="34" charset="-122"/>
+                <a:cs typeface="Calibri" pitchFamily="34" charset="-120"/>
+              </a:rPr>
+              <a:t> · il programma completo</a:t>
+            </a:r>
+            <a:endParaRPr lang="en-US" sz="1100" dirty="0"/>
+          </a:p>
+        </p:txBody>
+      </p:sp>
+      <p:sp>
+        <p:nvSpPr>
           <p:cNvPr id="25" name="Slide Number Placeholder 0"/>
           <p:cNvSpPr>
             <a:spLocks noGrp="1"/>
@@ -11258,6 +13015,158 @@
               <a:t>Modalità debug, in Settings: fermare il programma, leggere registri e memoria</a:t>
             </a:r>
             <a:endParaRPr lang="en-US" sz="1200" dirty="0"/>
+          </a:p>
+        </p:txBody>
+      </p:sp>
+      <p:sp>
+        <p:nvSpPr>
+          <p:cNvPr id="17" name="Shape 15"/>
+          <p:cNvSpPr/>
+          <p:nvPr/>
+        </p:nvSpPr>
+        <p:spPr>
+          <a:xfrm>
+            <a:off x="7875600" y="91440"/>
+            <a:ext cx="3767455" cy="274320"/>
+          </a:xfrm>
+          <a:prstGeom prst="rect">
+            <a:avLst/>
+          </a:prstGeom>
+          <a:solidFill>
+            <a:srgbClr val="FEF3C7"/>
+          </a:solidFill>
+          <a:ln w="12700">
+            <a:solidFill>
+              <a:srgbClr val="B45309"/>
+            </a:solidFill>
+            <a:prstDash val="solid"/>
+          </a:ln>
+        </p:spPr>
+      </p:sp>
+      <p:sp>
+        <p:nvSpPr>
+          <p:cNvPr id="18" name="Shape 16"/>
+          <p:cNvSpPr/>
+          <p:nvPr/>
+        </p:nvSpPr>
+        <p:spPr>
+          <a:xfrm>
+            <a:off x="7875600" y="91440"/>
+            <a:ext cx="27432" cy="274320"/>
+          </a:xfrm>
+          <a:prstGeom prst="rect">
+            <a:avLst/>
+          </a:prstGeom>
+          <a:solidFill>
+            <a:srgbClr val="B45309"/>
+          </a:solidFill>
+          <a:ln w="12700">
+            <a:solidFill>
+              <a:srgbClr val="B45309"/>
+            </a:solidFill>
+            <a:prstDash val="solid"/>
+          </a:ln>
+        </p:spPr>
+      </p:sp>
+      <p:sp>
+        <p:nvSpPr>
+          <p:cNvPr id="19" name="Shape 17"/>
+          <p:cNvSpPr/>
+          <p:nvPr/>
+        </p:nvSpPr>
+        <p:spPr>
+          <a:xfrm>
+            <a:off x="7930464" y="91440"/>
+            <a:ext cx="27432" cy="274320"/>
+          </a:xfrm>
+          <a:prstGeom prst="rect">
+            <a:avLst/>
+          </a:prstGeom>
+          <a:solidFill>
+            <a:srgbClr val="B45309"/>
+          </a:solidFill>
+          <a:ln w="12700">
+            <a:solidFill>
+              <a:srgbClr val="B45309"/>
+            </a:solidFill>
+            <a:prstDash val="solid"/>
+          </a:ln>
+        </p:spPr>
+      </p:sp>
+      <p:pic>
+        <p:nvPicPr>
+          <p:cNvPr id="20" name="Image 0" descr="preencoded.png">    </p:cNvPr>
+          <p:cNvPicPr>
+            <a:picLocks noChangeAspect="1"/>
+          </p:cNvPicPr>
+          <p:nvPr/>
+        </p:nvPicPr>
+        <p:blipFill>
+          <a:blip r:embed="rId1"/>
+          <a:stretch>
+            <a:fillRect/>
+          </a:stretch>
+        </p:blipFill>
+        <p:spPr>
+          <a:xfrm>
+            <a:off x="8003616" y="128016"/>
+            <a:ext cx="201168" cy="201168"/>
+          </a:xfrm>
+          <a:prstGeom prst="rect">
+            <a:avLst/>
+          </a:prstGeom>
+        </p:spPr>
+      </p:pic>
+      <p:sp>
+        <p:nvSpPr>
+          <p:cNvPr id="21" name="Text 18"/>
+          <p:cNvSpPr txBox="1"/>
+          <p:nvPr/>
+        </p:nvSpPr>
+        <p:spPr>
+          <a:xfrm>
+            <a:off x="8259648" y="91440"/>
+            <a:ext cx="3346831" cy="274320"/>
+          </a:xfrm>
+          <a:prstGeom prst="rect">
+            <a:avLst/>
+          </a:prstGeom>
+          <a:noFill/>
+          <a:ln/>
+        </p:spPr>
+        <p:txBody>
+          <a:bodyPr wrap="square" lIns="0" tIns="0" rIns="0" bIns="0" rtlCol="0" anchor="ctr"/>
+          <a:lstStyle/>
+          <a:p>
+            <a:pPr indent="0" marL="0">
+              <a:buNone/>
+            </a:pPr>
+            <a:r>
+              <a:rPr lang="en-US" sz="1100" b="1" dirty="0">
+                <a:solidFill>
+                  <a:srgbClr val="92400E"/>
+                </a:solidFill>
+                <a:latin typeface="Calibri" pitchFamily="34" charset="0"/>
+                <a:ea typeface="Calibri" pitchFamily="34" charset="-122"/>
+                <a:cs typeface="Calibri" pitchFamily="34" charset="-120"/>
+              </a:rPr>
+              <a:t>DA UTILIZZARE OGGI</a:t>
+            </a:r>
+            <a:pPr indent="0" marL="0">
+              <a:buNone/>
+            </a:pPr>
+            <a:r>
+              <a:rPr lang="en-US" sz="1100" dirty="0">
+                <a:solidFill>
+                  <a:srgbClr val="92400E"/>
+                </a:solidFill>
+                <a:latin typeface="Calibri" pitchFamily="34" charset="0"/>
+                <a:ea typeface="Calibri" pitchFamily="34" charset="-122"/>
+                <a:cs typeface="Calibri" pitchFamily="34" charset="-120"/>
+              </a:rPr>
+              <a:t> · gli strumenti di PRG32</a:t>
+            </a:r>
+            <a:endParaRPr lang="en-US" sz="1100" dirty="0"/>
           </a:p>
         </p:txBody>
       </p:sp>

--- a/it/slides/04-Architettura_dei_Calcolatori-Informazione_Digitale-Codice.pptx
+++ b/it/slides/04-Architettura_dei_Calcolatori-Informazione_Digitale-Codice.pptx
@@ -119,30 +119,30 @@
   <p:extLst>
     <p:ext uri="{521415D9-36F7-43E2-AB2F-B90AF26B5E84}">
       <p14:sectionLst xmlns:p14="http://schemas.microsoft.com/office/powerpoint/2010/main">
-        <p14:section name="Apertura" id="{0ebce88b-93cf-2bbe-43c3-6e147e48f994}">
+        <p14:section name="Apertura" id="{ec198802-a75a-7f71-b42e-2612daedc000}">
           <p14:sldIdLst>
             <p14:sldId id="256"/>
             <p14:sldId id="257"/>
           </p14:sldIdLst>
         </p14:section>
-        <p14:section name="Strutture dati" id="{7e585314-66ea-eb7b-0c47-2bf44f50bf18}">
+        <p14:section name="Strutture dati" id="{c52c20ea-03f2-fe86-ff08-aeaf805cbc56}">
           <p14:sldIdLst>
             <p14:sldId id="258"/>
           </p14:sldIdLst>
         </p14:section>
-        <p14:section name="Dati e algoritmi" id="{d61db9e4-e8f8-213d-6b6f-6c6e6be7281a}">
+        <p14:section name="Dati e algoritmi" id="{1ea0152a-039a-e13f-1aab-1dd5b130ee0d}">
           <p14:sldIdLst>
             <p14:sldId id="259"/>
           </p14:sldIdLst>
         </p14:section>
-        <p14:section name="Il programma completo" id="{c80bde0c-c975-c6fb-336b-201ebeef1c3f}">
+        <p14:section name="Il programma completo" id="{01d6c0fb-d6cf-7bf5-59bb-010d2934b430}">
           <p14:sldIdLst>
             <p14:sldId id="260"/>
             <p14:sldId id="261"/>
             <p14:sldId id="262"/>
           </p14:sldIdLst>
         </p14:section>
-        <p14:section name="Eseguire e provare" id="{6fb7b1c5-2cb4-e86d-e6fd-2bf020978f95}">
+        <p14:section name="Eseguire e provare" id="{367b9c24-0779-afd5-483a-f03052305f82}">
           <p14:sldIdLst>
             <p14:sldId id="263"/>
             <p14:sldId id="264"/>
@@ -151,7 +151,7 @@
             <p14:sldId id="267"/>
           </p14:sldIdLst>
         </p14:section>
-        <p14:section name="Esercizi" id="{cac513b0-1969-6380-7c86-276a60effe0a}">
+        <p14:section name="Esercizi" id="{974dc7b0-5cc7-811c-8587-c70a03f904ea}">
           <p14:sldIdLst>
             <p14:sldId id="268"/>
           </p14:sldIdLst>
